--- a/docs/Präsentation.pptx
+++ b/docs/Präsentation.pptx
@@ -5,7 +5,7 @@
     <p:sldMasterId id="2147483648" r:id="rId1"/>
   </p:sldMasterIdLst>
   <p:notesMasterIdLst>
-    <p:notesMasterId r:id="rId10"/>
+    <p:notesMasterId r:id="rId11"/>
   </p:notesMasterIdLst>
   <p:sldIdLst>
     <p:sldId id="256" r:id="rId2"/>
@@ -16,6 +16,7 @@
     <p:sldId id="260" r:id="rId7"/>
     <p:sldId id="259" r:id="rId8"/>
     <p:sldId id="258" r:id="rId9"/>
+    <p:sldId id="266" r:id="rId10"/>
   </p:sldIdLst>
   <p:sldSz cx="12192000" cy="6858000"/>
   <p:notesSz cx="6858000" cy="9144000"/>
@@ -215,7 +216,7 @@
           <a:p>
             <a:fld id="{38512B53-C6B7-4191-A002-20C0092FE8D4}" type="datetimeFigureOut">
               <a:rPr lang="de-DE" smtClean="0"/>
-              <a:t>01.05.2026</a:t>
+              <a:t>03.05.2026</a:t>
             </a:fld>
             <a:endParaRPr lang="de-DE"/>
           </a:p>
@@ -633,7 +634,7 @@
           <a:p>
             <a:fld id="{FFADA9AB-0C4D-4965-9358-8FFF91301F7B}" type="datetime1">
               <a:rPr lang="de-DE" smtClean="0"/>
-              <a:t>01.05.2026</a:t>
+              <a:t>03.05.2026</a:t>
             </a:fld>
             <a:endParaRPr lang="de-DE"/>
           </a:p>
@@ -847,7 +848,7 @@
           <a:p>
             <a:fld id="{B9A6E672-99C3-483D-BE0E-7BF0B1A9AC5A}" type="datetime1">
               <a:rPr lang="de-DE" smtClean="0"/>
-              <a:t>01.05.2026</a:t>
+              <a:t>03.05.2026</a:t>
             </a:fld>
             <a:endParaRPr lang="de-DE" dirty="0"/>
           </a:p>
@@ -1317,7 +1318,7 @@
           <a:p>
             <a:fld id="{EAEFACAF-C9AE-4A78-9B35-4313DFFFB42A}" type="datetime1">
               <a:rPr lang="de-DE" smtClean="0"/>
-              <a:t>01.05.2026</a:t>
+              <a:t>03.05.2026</a:t>
             </a:fld>
             <a:endParaRPr lang="de-DE"/>
           </a:p>
@@ -1585,7 +1586,7 @@
           <a:p>
             <a:fld id="{D14E19FC-45F4-4E8A-A834-BBBAB1A5E710}" type="datetime1">
               <a:rPr lang="de-DE" smtClean="0"/>
-              <a:t>01.05.2026</a:t>
+              <a:t>03.05.2026</a:t>
             </a:fld>
             <a:endParaRPr lang="de-DE"/>
           </a:p>
@@ -1729,7 +1730,7 @@
           <a:p>
             <a:fld id="{3E086AD1-C6AA-4A0B-9285-E76F4B3B589A}" type="datetime1">
               <a:rPr lang="de-DE" smtClean="0"/>
-              <a:t>01.05.2026</a:t>
+              <a:t>03.05.2026</a:t>
             </a:fld>
             <a:endParaRPr lang="de-DE"/>
           </a:p>
@@ -1845,7 +1846,7 @@
           <a:p>
             <a:fld id="{985ED463-2B82-4176-987F-FE0CD52B7183}" type="datetime1">
               <a:rPr lang="de-DE" smtClean="0"/>
-              <a:t>01.05.2026</a:t>
+              <a:t>03.05.2026</a:t>
             </a:fld>
             <a:endParaRPr lang="de-DE"/>
           </a:p>
@@ -2159,7 +2160,7 @@
           <a:p>
             <a:fld id="{97BFB6AD-16C0-45CD-8B8F-8B1AA82EECDC}" type="datetime1">
               <a:rPr lang="de-DE" smtClean="0"/>
-              <a:t>01.05.2026</a:t>
+              <a:t>03.05.2026</a:t>
             </a:fld>
             <a:endParaRPr lang="de-DE"/>
           </a:p>
@@ -2450,7 +2451,7 @@
           <a:p>
             <a:fld id="{FFAF23D8-F1F0-4A69-A6DD-E86644081154}" type="datetime1">
               <a:rPr lang="de-DE" smtClean="0"/>
-              <a:t>01.05.2026</a:t>
+              <a:t>03.05.2026</a:t>
             </a:fld>
             <a:endParaRPr lang="de-DE"/>
           </a:p>
@@ -2698,7 +2699,7 @@
             <a:fld id="{B9A6E672-99C3-483D-BE0E-7BF0B1A9AC5A}" type="datetime1">
               <a:rPr lang="de-DE" smtClean="0"/>
               <a:pPr/>
-              <a:t>01.05.2026</a:t>
+              <a:t>03.05.2026</a:t>
             </a:fld>
             <a:endParaRPr lang="de-DE" dirty="0"/>
           </a:p>
@@ -3390,7 +3391,7 @@
         <p:spPr>
           <a:xfrm>
             <a:off x="987826" y="1269507"/>
-            <a:ext cx="2880360" cy="720000"/>
+            <a:ext cx="4680000" cy="720000"/>
           </a:xfrm>
           <a:prstGeom prst="roundRect">
             <a:avLst/>
@@ -3447,7 +3448,7 @@
           <a:p>
             <a:fld id="{985ED463-2B82-4176-987F-FE0CD52B7183}" type="datetime1">
               <a:rPr lang="de-DE" smtClean="0"/>
-              <a:t>01.05.2026</a:t>
+              <a:t>03.05.2026</a:t>
             </a:fld>
             <a:endParaRPr lang="de-DE"/>
           </a:p>
@@ -3566,8 +3567,8 @@
         </p:nvSpPr>
         <p:spPr>
           <a:xfrm>
-            <a:off x="987826" y="1269507"/>
-            <a:ext cx="2412000" cy="461665"/>
+            <a:off x="987826" y="1269506"/>
+            <a:ext cx="4320000" cy="504000"/>
           </a:xfrm>
           <a:prstGeom prst="rect">
             <a:avLst/>
@@ -3588,7 +3589,7 @@
                 <a:latin typeface="Segoe UI" panose="020B0502040204020203" pitchFamily="34" charset="0"/>
                 <a:cs typeface="Segoe UI" panose="020B0502040204020203" pitchFamily="34" charset="0"/>
               </a:rPr>
-              <a:t>01 Einleitung</a:t>
+              <a:t>01 Einführung</a:t>
             </a:r>
             <a:endParaRPr lang="de-DE" sz="2800" dirty="0">
               <a:solidFill>
@@ -3908,13 +3909,13 @@
   <p:clrMapOvr>
     <a:masterClrMapping/>
   </p:clrMapOvr>
-  <mc:AlternateContent xmlns:mc="http://schemas.openxmlformats.org/markup-compatibility/2006">
-    <mc:Choice xmlns:p159="http://schemas.microsoft.com/office/powerpoint/2015/09/main" Requires="p159">
+  <mc:AlternateContent xmlns:mc="http://schemas.openxmlformats.org/markup-compatibility/2006" xmlns:p159="http://schemas.microsoft.com/office/powerpoint/2015/09/main">
+    <mc:Choice Requires="p159">
       <p:transition xmlns:p14="http://schemas.microsoft.com/office/powerpoint/2010/main" spd="slow" p14:dur="2000">
         <p159:morph option="byObject"/>
       </p:transition>
     </mc:Choice>
-    <mc:Fallback>
+    <mc:Fallback xmlns="">
       <p:transition spd="slow">
         <p:fade/>
       </p:transition>
@@ -3969,7 +3970,7 @@
         <p:spPr>
           <a:xfrm>
             <a:off x="984778" y="1963743"/>
-            <a:ext cx="2880360" cy="720000"/>
+            <a:ext cx="4680000" cy="720000"/>
           </a:xfrm>
           <a:prstGeom prst="roundRect">
             <a:avLst/>
@@ -4026,7 +4027,7 @@
           <a:p>
             <a:fld id="{985ED463-2B82-4176-987F-FE0CD52B7183}" type="datetime1">
               <a:rPr lang="de-DE" smtClean="0"/>
-              <a:t>01.05.2026</a:t>
+              <a:t>03.05.2026</a:t>
             </a:fld>
             <a:endParaRPr lang="de-DE"/>
           </a:p>
@@ -4145,8 +4146,8 @@
         </p:nvSpPr>
         <p:spPr>
           <a:xfrm>
-            <a:off x="987826" y="1269507"/>
-            <a:ext cx="2412000" cy="461665"/>
+            <a:off x="987826" y="1269506"/>
+            <a:ext cx="4320000" cy="504000"/>
           </a:xfrm>
           <a:prstGeom prst="rect">
             <a:avLst/>
@@ -4167,7 +4168,7 @@
                 <a:latin typeface="Segoe UI" panose="020B0502040204020203" pitchFamily="34" charset="0"/>
                 <a:cs typeface="Segoe UI" panose="020B0502040204020203" pitchFamily="34" charset="0"/>
               </a:rPr>
-              <a:t>01 Einleitung</a:t>
+              <a:t>01 Einführung</a:t>
             </a:r>
             <a:endParaRPr lang="de-DE" sz="2800" dirty="0">
               <a:solidFill>
@@ -4193,8 +4194,8 @@
         </p:nvSpPr>
         <p:spPr>
           <a:xfrm>
-            <a:off x="987826" y="2001345"/>
-            <a:ext cx="2412000" cy="461665"/>
+            <a:off x="987824" y="2001345"/>
+            <a:ext cx="4320000" cy="504000"/>
           </a:xfrm>
           <a:prstGeom prst="rect">
             <a:avLst/>
@@ -4215,7 +4216,7 @@
                 <a:latin typeface="Segoe UI" panose="020B0502040204020203" pitchFamily="34" charset="0"/>
                 <a:cs typeface="Segoe UI" panose="020B0502040204020203" pitchFamily="34" charset="0"/>
               </a:rPr>
-              <a:t>02 Grundlagen</a:t>
+              <a:t>02 Reguläre Ausdrücke in Java</a:t>
             </a:r>
             <a:endParaRPr lang="de-DE" sz="2800" dirty="0">
               <a:solidFill>
@@ -4487,13 +4488,13 @@
   <p:clrMapOvr>
     <a:masterClrMapping/>
   </p:clrMapOvr>
-  <mc:AlternateContent xmlns:mc="http://schemas.openxmlformats.org/markup-compatibility/2006">
-    <mc:Choice xmlns:p159="http://schemas.microsoft.com/office/powerpoint/2015/09/main" Requires="p159">
+  <mc:AlternateContent xmlns:mc="http://schemas.openxmlformats.org/markup-compatibility/2006" xmlns:p159="http://schemas.microsoft.com/office/powerpoint/2015/09/main">
+    <mc:Choice Requires="p159">
       <p:transition xmlns:p14="http://schemas.microsoft.com/office/powerpoint/2010/main" spd="slow" p14:dur="2000">
         <p159:morph option="byObject"/>
       </p:transition>
     </mc:Choice>
-    <mc:Fallback>
+    <mc:Fallback xmlns="">
       <p:transition spd="slow">
         <p:fade/>
       </p:transition>
@@ -4548,7 +4549,7 @@
         <p:spPr>
           <a:xfrm>
             <a:off x="987826" y="2709000"/>
-            <a:ext cx="2880360" cy="720000"/>
+            <a:ext cx="4680000" cy="720000"/>
           </a:xfrm>
           <a:prstGeom prst="roundRect">
             <a:avLst/>
@@ -4605,7 +4606,7 @@
           <a:p>
             <a:fld id="{985ED463-2B82-4176-987F-FE0CD52B7183}" type="datetime1">
               <a:rPr lang="de-DE" smtClean="0"/>
-              <a:t>01.05.2026</a:t>
+              <a:t>03.05.2026</a:t>
             </a:fld>
             <a:endParaRPr lang="de-DE"/>
           </a:p>
@@ -4724,8 +4725,8 @@
         </p:nvSpPr>
         <p:spPr>
           <a:xfrm>
-            <a:off x="987826" y="1269507"/>
-            <a:ext cx="2412000" cy="461665"/>
+            <a:off x="987826" y="1269506"/>
+            <a:ext cx="4320000" cy="504000"/>
           </a:xfrm>
           <a:prstGeom prst="rect">
             <a:avLst/>
@@ -4746,7 +4747,7 @@
                 <a:latin typeface="Segoe UI" panose="020B0502040204020203" pitchFamily="34" charset="0"/>
                 <a:cs typeface="Segoe UI" panose="020B0502040204020203" pitchFamily="34" charset="0"/>
               </a:rPr>
-              <a:t>01 Einleitung</a:t>
+              <a:t>01 Einführung</a:t>
             </a:r>
             <a:endParaRPr lang="de-DE" sz="2800" dirty="0">
               <a:solidFill>
@@ -4772,8 +4773,8 @@
         </p:nvSpPr>
         <p:spPr>
           <a:xfrm>
-            <a:off x="987826" y="2001345"/>
-            <a:ext cx="2412000" cy="461665"/>
+            <a:off x="987826" y="2001344"/>
+            <a:ext cx="4320000" cy="504000"/>
           </a:xfrm>
           <a:prstGeom prst="rect">
             <a:avLst/>
@@ -4794,7 +4795,7 @@
                 <a:latin typeface="Segoe UI" panose="020B0502040204020203" pitchFamily="34" charset="0"/>
                 <a:cs typeface="Segoe UI" panose="020B0502040204020203" pitchFamily="34" charset="0"/>
               </a:rPr>
-              <a:t>02 Grundlagen</a:t>
+              <a:t>02 Reguläre Ausdrücke in Java</a:t>
             </a:r>
             <a:endParaRPr lang="de-DE" sz="2800" dirty="0">
               <a:solidFill>
@@ -4820,8 +4821,8 @@
         </p:nvSpPr>
         <p:spPr>
           <a:xfrm>
-            <a:off x="987826" y="2733183"/>
-            <a:ext cx="2412000" cy="461665"/>
+            <a:off x="987826" y="2733182"/>
+            <a:ext cx="4320000" cy="461665"/>
           </a:xfrm>
           <a:prstGeom prst="rect">
             <a:avLst/>
@@ -4862,7 +4863,27 @@
                 <a:latin typeface="Segoe UI" panose="020B0502040204020203" pitchFamily="34" charset="0"/>
                 <a:cs typeface="Segoe UI" panose="020B0502040204020203" pitchFamily="34" charset="0"/>
               </a:rPr>
-              <a:t>Technologien</a:t>
+              <a:t>Java </a:t>
+            </a:r>
+            <a:r>
+              <a:rPr lang="de-DE" sz="2400" dirty="0" err="1">
+                <a:solidFill>
+                  <a:srgbClr val="00E5FF"/>
+                </a:solidFill>
+                <a:latin typeface="Segoe UI" panose="020B0502040204020203" pitchFamily="34" charset="0"/>
+                <a:cs typeface="Segoe UI" panose="020B0502040204020203" pitchFamily="34" charset="0"/>
+              </a:rPr>
+              <a:t>Regex</a:t>
+            </a:r>
+            <a:r>
+              <a:rPr lang="de-DE" sz="2400" dirty="0">
+                <a:solidFill>
+                  <a:srgbClr val="00E5FF"/>
+                </a:solidFill>
+                <a:latin typeface="Segoe UI" panose="020B0502040204020203" pitchFamily="34" charset="0"/>
+                <a:cs typeface="Segoe UI" panose="020B0502040204020203" pitchFamily="34" charset="0"/>
+              </a:rPr>
+              <a:t> API</a:t>
             </a:r>
             <a:endParaRPr lang="de-DE" sz="2800" dirty="0">
               <a:solidFill>
@@ -5086,13 +5107,13 @@
   <p:clrMapOvr>
     <a:masterClrMapping/>
   </p:clrMapOvr>
-  <mc:AlternateContent xmlns:mc="http://schemas.openxmlformats.org/markup-compatibility/2006">
-    <mc:Choice xmlns:p159="http://schemas.microsoft.com/office/powerpoint/2015/09/main" Requires="p159">
+  <mc:AlternateContent xmlns:mc="http://schemas.openxmlformats.org/markup-compatibility/2006" xmlns:p159="http://schemas.microsoft.com/office/powerpoint/2015/09/main">
+    <mc:Choice Requires="p159">
       <p:transition xmlns:p14="http://schemas.microsoft.com/office/powerpoint/2010/main" spd="slow" p14:dur="2000">
         <p159:morph option="byObject"/>
       </p:transition>
     </mc:Choice>
-    <mc:Fallback>
+    <mc:Fallback xmlns="">
       <p:transition spd="slow">
         <p:fade/>
       </p:transition>
@@ -5147,7 +5168,7 @@
         <p:spPr>
           <a:xfrm>
             <a:off x="987826" y="3411026"/>
-            <a:ext cx="2880360" cy="720000"/>
+            <a:ext cx="4680000" cy="720000"/>
           </a:xfrm>
           <a:prstGeom prst="roundRect">
             <a:avLst/>
@@ -5204,7 +5225,7 @@
           <a:p>
             <a:fld id="{985ED463-2B82-4176-987F-FE0CD52B7183}" type="datetime1">
               <a:rPr lang="de-DE" smtClean="0"/>
-              <a:t>01.05.2026</a:t>
+              <a:t>03.05.2026</a:t>
             </a:fld>
             <a:endParaRPr lang="de-DE"/>
           </a:p>
@@ -5323,8 +5344,8 @@
         </p:nvSpPr>
         <p:spPr>
           <a:xfrm>
-            <a:off x="987826" y="1269507"/>
-            <a:ext cx="2412000" cy="461665"/>
+            <a:off x="987826" y="1269506"/>
+            <a:ext cx="4320000" cy="504000"/>
           </a:xfrm>
           <a:prstGeom prst="rect">
             <a:avLst/>
@@ -5345,7 +5366,7 @@
                 <a:latin typeface="Segoe UI" panose="020B0502040204020203" pitchFamily="34" charset="0"/>
                 <a:cs typeface="Segoe UI" panose="020B0502040204020203" pitchFamily="34" charset="0"/>
               </a:rPr>
-              <a:t>01 Einleitung</a:t>
+              <a:t>01 Einführung</a:t>
             </a:r>
             <a:endParaRPr lang="de-DE" sz="2800" dirty="0">
               <a:solidFill>
@@ -5371,8 +5392,8 @@
         </p:nvSpPr>
         <p:spPr>
           <a:xfrm>
-            <a:off x="987826" y="2001345"/>
-            <a:ext cx="2412000" cy="461665"/>
+            <a:off x="987826" y="2001344"/>
+            <a:ext cx="4320000" cy="461665"/>
           </a:xfrm>
           <a:prstGeom prst="rect">
             <a:avLst/>
@@ -5393,7 +5414,7 @@
                 <a:latin typeface="Segoe UI" panose="020B0502040204020203" pitchFamily="34" charset="0"/>
                 <a:cs typeface="Segoe UI" panose="020B0502040204020203" pitchFamily="34" charset="0"/>
               </a:rPr>
-              <a:t>02 Grundlagen</a:t>
+              <a:t>02 Reguläre Ausdrücke in Java</a:t>
             </a:r>
             <a:endParaRPr lang="de-DE" sz="2800" dirty="0">
               <a:solidFill>
@@ -5419,8 +5440,8 @@
         </p:nvSpPr>
         <p:spPr>
           <a:xfrm>
-            <a:off x="987826" y="2733183"/>
-            <a:ext cx="2412000" cy="461665"/>
+            <a:off x="987826" y="2733182"/>
+            <a:ext cx="4320000" cy="461665"/>
           </a:xfrm>
           <a:prstGeom prst="rect">
             <a:avLst/>
@@ -5441,7 +5462,27 @@
                 <a:latin typeface="Segoe UI" panose="020B0502040204020203" pitchFamily="34" charset="0"/>
                 <a:cs typeface="Segoe UI" panose="020B0502040204020203" pitchFamily="34" charset="0"/>
               </a:rPr>
-              <a:t>03 Technologien</a:t>
+              <a:t>03 Java </a:t>
+            </a:r>
+            <a:r>
+              <a:rPr lang="de-DE" sz="2400" dirty="0" err="1">
+                <a:solidFill>
+                  <a:schemeClr val="bg1"/>
+                </a:solidFill>
+                <a:latin typeface="Segoe UI" panose="020B0502040204020203" pitchFamily="34" charset="0"/>
+                <a:cs typeface="Segoe UI" panose="020B0502040204020203" pitchFamily="34" charset="0"/>
+              </a:rPr>
+              <a:t>Regex</a:t>
+            </a:r>
+            <a:r>
+              <a:rPr lang="de-DE" sz="2400" dirty="0">
+                <a:solidFill>
+                  <a:schemeClr val="bg1"/>
+                </a:solidFill>
+                <a:latin typeface="Segoe UI" panose="020B0502040204020203" pitchFamily="34" charset="0"/>
+                <a:cs typeface="Segoe UI" panose="020B0502040204020203" pitchFamily="34" charset="0"/>
+              </a:rPr>
+              <a:t> API</a:t>
             </a:r>
             <a:endParaRPr lang="de-DE" sz="2800" dirty="0">
               <a:solidFill>
@@ -5467,8 +5508,8 @@
         </p:nvSpPr>
         <p:spPr>
           <a:xfrm>
-            <a:off x="987826" y="3465021"/>
-            <a:ext cx="2412000" cy="461665"/>
+            <a:off x="987826" y="3465020"/>
+            <a:ext cx="4320000" cy="461665"/>
           </a:xfrm>
           <a:prstGeom prst="rect">
             <a:avLst/>
@@ -5489,7 +5530,7 @@
                 <a:latin typeface="Segoe UI" panose="020B0502040204020203" pitchFamily="34" charset="0"/>
                 <a:cs typeface="Segoe UI" panose="020B0502040204020203" pitchFamily="34" charset="0"/>
               </a:rPr>
-              <a:t>04 Programm</a:t>
+              <a:t>04 Barcode Grundlagen</a:t>
             </a:r>
             <a:endParaRPr lang="de-DE" sz="2800" dirty="0">
               <a:solidFill>
@@ -5665,13 +5706,13 @@
   <p:clrMapOvr>
     <a:masterClrMapping/>
   </p:clrMapOvr>
-  <mc:AlternateContent xmlns:mc="http://schemas.openxmlformats.org/markup-compatibility/2006">
-    <mc:Choice xmlns:p159="http://schemas.microsoft.com/office/powerpoint/2015/09/main" Requires="p159">
+  <mc:AlternateContent xmlns:mc="http://schemas.openxmlformats.org/markup-compatibility/2006" xmlns:p159="http://schemas.microsoft.com/office/powerpoint/2015/09/main">
+    <mc:Choice Requires="p159">
       <p:transition xmlns:p14="http://schemas.microsoft.com/office/powerpoint/2010/main" spd="slow" p14:dur="2000">
         <p159:morph option="byObject"/>
       </p:transition>
     </mc:Choice>
-    <mc:Fallback>
+    <mc:Fallback xmlns="">
       <p:transition spd="slow">
         <p:fade/>
       </p:transition>
@@ -5726,7 +5767,7 @@
         <p:spPr>
           <a:xfrm>
             <a:off x="987826" y="4124815"/>
-            <a:ext cx="2880360" cy="720000"/>
+            <a:ext cx="4680000" cy="720000"/>
           </a:xfrm>
           <a:prstGeom prst="roundRect">
             <a:avLst/>
@@ -5783,7 +5824,7 @@
           <a:p>
             <a:fld id="{985ED463-2B82-4176-987F-FE0CD52B7183}" type="datetime1">
               <a:rPr lang="de-DE" smtClean="0"/>
-              <a:t>01.05.2026</a:t>
+              <a:t>03.05.2026</a:t>
             </a:fld>
             <a:endParaRPr lang="de-DE"/>
           </a:p>
@@ -5902,8 +5943,8 @@
         </p:nvSpPr>
         <p:spPr>
           <a:xfrm>
-            <a:off x="987826" y="1269507"/>
-            <a:ext cx="2412000" cy="461665"/>
+            <a:off x="987826" y="1269506"/>
+            <a:ext cx="4320000" cy="504000"/>
           </a:xfrm>
           <a:prstGeom prst="rect">
             <a:avLst/>
@@ -5924,7 +5965,7 @@
                 <a:latin typeface="Segoe UI" panose="020B0502040204020203" pitchFamily="34" charset="0"/>
                 <a:cs typeface="Segoe UI" panose="020B0502040204020203" pitchFamily="34" charset="0"/>
               </a:rPr>
-              <a:t>01 Einleitung</a:t>
+              <a:t>01 Einführung</a:t>
             </a:r>
             <a:endParaRPr lang="de-DE" sz="2800" dirty="0">
               <a:solidFill>
@@ -5950,8 +5991,8 @@
         </p:nvSpPr>
         <p:spPr>
           <a:xfrm>
-            <a:off x="987826" y="2001345"/>
-            <a:ext cx="2412000" cy="461665"/>
+            <a:off x="987826" y="2001344"/>
+            <a:ext cx="4320000" cy="461665"/>
           </a:xfrm>
           <a:prstGeom prst="rect">
             <a:avLst/>
@@ -5972,7 +6013,7 @@
                 <a:latin typeface="Segoe UI" panose="020B0502040204020203" pitchFamily="34" charset="0"/>
                 <a:cs typeface="Segoe UI" panose="020B0502040204020203" pitchFamily="34" charset="0"/>
               </a:rPr>
-              <a:t>02 Grundlagen</a:t>
+              <a:t>02 Reguläre Ausdrücke in Java</a:t>
             </a:r>
             <a:endParaRPr lang="de-DE" sz="2800" dirty="0">
               <a:solidFill>
@@ -5998,8 +6039,8 @@
         </p:nvSpPr>
         <p:spPr>
           <a:xfrm>
-            <a:off x="987826" y="2733183"/>
-            <a:ext cx="2412000" cy="461665"/>
+            <a:off x="987826" y="2733182"/>
+            <a:ext cx="4320000" cy="461665"/>
           </a:xfrm>
           <a:prstGeom prst="rect">
             <a:avLst/>
@@ -6020,7 +6061,27 @@
                 <a:latin typeface="Segoe UI" panose="020B0502040204020203" pitchFamily="34" charset="0"/>
                 <a:cs typeface="Segoe UI" panose="020B0502040204020203" pitchFamily="34" charset="0"/>
               </a:rPr>
-              <a:t>03 Technologien</a:t>
+              <a:t>03 Java </a:t>
+            </a:r>
+            <a:r>
+              <a:rPr lang="de-DE" sz="2400" dirty="0" err="1">
+                <a:solidFill>
+                  <a:schemeClr val="bg1"/>
+                </a:solidFill>
+                <a:latin typeface="Segoe UI" panose="020B0502040204020203" pitchFamily="34" charset="0"/>
+                <a:cs typeface="Segoe UI" panose="020B0502040204020203" pitchFamily="34" charset="0"/>
+              </a:rPr>
+              <a:t>Regex</a:t>
+            </a:r>
+            <a:r>
+              <a:rPr lang="de-DE" sz="2400" dirty="0">
+                <a:solidFill>
+                  <a:schemeClr val="bg1"/>
+                </a:solidFill>
+                <a:latin typeface="Segoe UI" panose="020B0502040204020203" pitchFamily="34" charset="0"/>
+                <a:cs typeface="Segoe UI" panose="020B0502040204020203" pitchFamily="34" charset="0"/>
+              </a:rPr>
+              <a:t> API</a:t>
             </a:r>
             <a:endParaRPr lang="de-DE" sz="2800" dirty="0">
               <a:solidFill>
@@ -6046,8 +6107,8 @@
         </p:nvSpPr>
         <p:spPr>
           <a:xfrm>
-            <a:off x="987826" y="3465021"/>
-            <a:ext cx="2412000" cy="461665"/>
+            <a:off x="987826" y="3465020"/>
+            <a:ext cx="4320000" cy="461665"/>
           </a:xfrm>
           <a:prstGeom prst="rect">
             <a:avLst/>
@@ -6068,7 +6129,7 @@
                 <a:latin typeface="Segoe UI" panose="020B0502040204020203" pitchFamily="34" charset="0"/>
                 <a:cs typeface="Segoe UI" panose="020B0502040204020203" pitchFamily="34" charset="0"/>
               </a:rPr>
-              <a:t>04 Programm</a:t>
+              <a:t>04 Barcode Grundlagen</a:t>
             </a:r>
             <a:endParaRPr lang="de-DE" sz="2800" dirty="0">
               <a:solidFill>
@@ -6094,8 +6155,8 @@
         </p:nvSpPr>
         <p:spPr>
           <a:xfrm>
-            <a:off x="987826" y="4196857"/>
-            <a:ext cx="2412000" cy="461665"/>
+            <a:off x="987826" y="4196856"/>
+            <a:ext cx="4320000" cy="461665"/>
           </a:xfrm>
           <a:prstGeom prst="rect">
             <a:avLst/>
@@ -6116,17 +6177,7 @@
                 <a:latin typeface="Segoe UI" panose="020B0502040204020203" pitchFamily="34" charset="0"/>
                 <a:cs typeface="Segoe UI" panose="020B0502040204020203" pitchFamily="34" charset="0"/>
               </a:rPr>
-              <a:t>05 Ipse </a:t>
-            </a:r>
-            <a:r>
-              <a:rPr lang="de-DE" sz="2400" dirty="0" err="1">
-                <a:solidFill>
-                  <a:srgbClr val="00E5FF"/>
-                </a:solidFill>
-                <a:latin typeface="Segoe UI" panose="020B0502040204020203" pitchFamily="34" charset="0"/>
-                <a:cs typeface="Segoe UI" panose="020B0502040204020203" pitchFamily="34" charset="0"/>
-              </a:rPr>
-              <a:t>Lorum</a:t>
+              <a:t>05 QR-Code Grundlagen</a:t>
             </a:r>
             <a:endParaRPr lang="de-DE" sz="2800" dirty="0">
               <a:solidFill>
@@ -6244,13 +6295,13 @@
   <p:clrMapOvr>
     <a:masterClrMapping/>
   </p:clrMapOvr>
-  <mc:AlternateContent xmlns:mc="http://schemas.openxmlformats.org/markup-compatibility/2006">
-    <mc:Choice xmlns:p159="http://schemas.microsoft.com/office/powerpoint/2015/09/main" Requires="p159">
+  <mc:AlternateContent xmlns:mc="http://schemas.openxmlformats.org/markup-compatibility/2006" xmlns:p159="http://schemas.microsoft.com/office/powerpoint/2015/09/main">
+    <mc:Choice Requires="p159">
       <p:transition xmlns:p14="http://schemas.microsoft.com/office/powerpoint/2010/main" spd="slow" p14:dur="2000">
         <p159:morph option="byObject"/>
       </p:transition>
     </mc:Choice>
-    <mc:Fallback>
+    <mc:Fallback xmlns="">
       <p:transition spd="slow">
         <p:fade/>
       </p:transition>
@@ -6305,7 +6356,7 @@
         <p:spPr>
           <a:xfrm>
             <a:off x="987826" y="4781518"/>
-            <a:ext cx="2880360" cy="720000"/>
+            <a:ext cx="4680000" cy="720000"/>
           </a:xfrm>
           <a:prstGeom prst="roundRect">
             <a:avLst/>
@@ -6362,7 +6413,7 @@
           <a:p>
             <a:fld id="{985ED463-2B82-4176-987F-FE0CD52B7183}" type="datetime1">
               <a:rPr lang="de-DE" smtClean="0"/>
-              <a:t>01.05.2026</a:t>
+              <a:t>03.05.2026</a:t>
             </a:fld>
             <a:endParaRPr lang="de-DE"/>
           </a:p>
@@ -6481,8 +6532,8 @@
         </p:nvSpPr>
         <p:spPr>
           <a:xfrm>
-            <a:off x="987826" y="1269507"/>
-            <a:ext cx="2412000" cy="461665"/>
+            <a:off x="987826" y="1269506"/>
+            <a:ext cx="4320000" cy="461665"/>
           </a:xfrm>
           <a:prstGeom prst="rect">
             <a:avLst/>
@@ -6503,7 +6554,7 @@
                 <a:latin typeface="Segoe UI" panose="020B0502040204020203" pitchFamily="34" charset="0"/>
                 <a:cs typeface="Segoe UI" panose="020B0502040204020203" pitchFamily="34" charset="0"/>
               </a:rPr>
-              <a:t>01 Einleitung</a:t>
+              <a:t>01 Einführung</a:t>
             </a:r>
             <a:endParaRPr lang="de-DE" sz="2800" dirty="0">
               <a:solidFill>
@@ -6529,8 +6580,8 @@
         </p:nvSpPr>
         <p:spPr>
           <a:xfrm>
-            <a:off x="987826" y="2001345"/>
-            <a:ext cx="2412000" cy="461665"/>
+            <a:off x="987826" y="2001344"/>
+            <a:ext cx="4320000" cy="461665"/>
           </a:xfrm>
           <a:prstGeom prst="rect">
             <a:avLst/>
@@ -6551,7 +6602,7 @@
                 <a:latin typeface="Segoe UI" panose="020B0502040204020203" pitchFamily="34" charset="0"/>
                 <a:cs typeface="Segoe UI" panose="020B0502040204020203" pitchFamily="34" charset="0"/>
               </a:rPr>
-              <a:t>02 Grundlagen</a:t>
+              <a:t>02 Reguläre Ausdrücke in Java</a:t>
             </a:r>
             <a:endParaRPr lang="de-DE" sz="2800" dirty="0">
               <a:solidFill>
@@ -6577,8 +6628,8 @@
         </p:nvSpPr>
         <p:spPr>
           <a:xfrm>
-            <a:off x="987826" y="2733183"/>
-            <a:ext cx="2412000" cy="461665"/>
+            <a:off x="987826" y="2733182"/>
+            <a:ext cx="4320000" cy="461665"/>
           </a:xfrm>
           <a:prstGeom prst="rect">
             <a:avLst/>
@@ -6599,7 +6650,27 @@
                 <a:latin typeface="Segoe UI" panose="020B0502040204020203" pitchFamily="34" charset="0"/>
                 <a:cs typeface="Segoe UI" panose="020B0502040204020203" pitchFamily="34" charset="0"/>
               </a:rPr>
-              <a:t>03 Technologien</a:t>
+              <a:t>03 Java </a:t>
+            </a:r>
+            <a:r>
+              <a:rPr lang="de-DE" sz="2400" dirty="0" err="1">
+                <a:solidFill>
+                  <a:schemeClr val="bg1"/>
+                </a:solidFill>
+                <a:latin typeface="Segoe UI" panose="020B0502040204020203" pitchFamily="34" charset="0"/>
+                <a:cs typeface="Segoe UI" panose="020B0502040204020203" pitchFamily="34" charset="0"/>
+              </a:rPr>
+              <a:t>Regex</a:t>
+            </a:r>
+            <a:r>
+              <a:rPr lang="de-DE" sz="2400" dirty="0">
+                <a:solidFill>
+                  <a:schemeClr val="bg1"/>
+                </a:solidFill>
+                <a:latin typeface="Segoe UI" panose="020B0502040204020203" pitchFamily="34" charset="0"/>
+                <a:cs typeface="Segoe UI" panose="020B0502040204020203" pitchFamily="34" charset="0"/>
+              </a:rPr>
+              <a:t> API</a:t>
             </a:r>
             <a:endParaRPr lang="de-DE" sz="2800" dirty="0">
               <a:solidFill>
@@ -6625,8 +6696,8 @@
         </p:nvSpPr>
         <p:spPr>
           <a:xfrm>
-            <a:off x="987826" y="3465021"/>
-            <a:ext cx="2412000" cy="461665"/>
+            <a:off x="987826" y="3465020"/>
+            <a:ext cx="4320000" cy="461665"/>
           </a:xfrm>
           <a:prstGeom prst="rect">
             <a:avLst/>
@@ -6647,7 +6718,7 @@
                 <a:latin typeface="Segoe UI" panose="020B0502040204020203" pitchFamily="34" charset="0"/>
                 <a:cs typeface="Segoe UI" panose="020B0502040204020203" pitchFamily="34" charset="0"/>
               </a:rPr>
-              <a:t>04 Programm</a:t>
+              <a:t>04 Barcode Grundlagen</a:t>
             </a:r>
             <a:endParaRPr lang="de-DE" sz="2800" dirty="0">
               <a:solidFill>
@@ -6673,8 +6744,8 @@
         </p:nvSpPr>
         <p:spPr>
           <a:xfrm>
-            <a:off x="987826" y="4196857"/>
-            <a:ext cx="2412000" cy="461665"/>
+            <a:off x="987826" y="4196856"/>
+            <a:ext cx="4320000" cy="461665"/>
           </a:xfrm>
           <a:prstGeom prst="rect">
             <a:avLst/>
@@ -6695,17 +6766,7 @@
                 <a:latin typeface="Segoe UI" panose="020B0502040204020203" pitchFamily="34" charset="0"/>
                 <a:cs typeface="Segoe UI" panose="020B0502040204020203" pitchFamily="34" charset="0"/>
               </a:rPr>
-              <a:t>05 Ipse </a:t>
-            </a:r>
-            <a:r>
-              <a:rPr lang="de-DE" sz="2400" dirty="0" err="1">
-                <a:solidFill>
-                  <a:schemeClr val="bg1"/>
-                </a:solidFill>
-                <a:latin typeface="Segoe UI" panose="020B0502040204020203" pitchFamily="34" charset="0"/>
-                <a:cs typeface="Segoe UI" panose="020B0502040204020203" pitchFamily="34" charset="0"/>
-              </a:rPr>
-              <a:t>Lorum</a:t>
+              <a:t>05 QR-Code Grundlagen</a:t>
             </a:r>
             <a:endParaRPr lang="de-DE" sz="2800" dirty="0">
               <a:solidFill>
@@ -6731,8 +6792,8 @@
         </p:nvSpPr>
         <p:spPr>
           <a:xfrm>
-            <a:off x="987826" y="4892674"/>
-            <a:ext cx="2412000" cy="461665"/>
+            <a:off x="987826" y="4892673"/>
+            <a:ext cx="4320000" cy="461665"/>
           </a:xfrm>
           <a:prstGeom prst="rect">
             <a:avLst/>
@@ -6753,7 +6814,27 @@
                 <a:latin typeface="Segoe UI" panose="020B0502040204020203" pitchFamily="34" charset="0"/>
                 <a:cs typeface="Segoe UI" panose="020B0502040204020203" pitchFamily="34" charset="0"/>
               </a:rPr>
-              <a:t>06 Ergebnisse</a:t>
+              <a:t>06 </a:t>
+            </a:r>
+            <a:r>
+              <a:rPr lang="de-DE" sz="2400" dirty="0" err="1">
+                <a:solidFill>
+                  <a:srgbClr val="00E5FF"/>
+                </a:solidFill>
+                <a:latin typeface="Segoe UI" panose="020B0502040204020203" pitchFamily="34" charset="0"/>
+                <a:cs typeface="Segoe UI" panose="020B0502040204020203" pitchFamily="34" charset="0"/>
+              </a:rPr>
+              <a:t>Regex</a:t>
+            </a:r>
+            <a:r>
+              <a:rPr lang="de-DE" sz="2400" dirty="0">
+                <a:solidFill>
+                  <a:srgbClr val="00E5FF"/>
+                </a:solidFill>
+                <a:latin typeface="Segoe UI" panose="020B0502040204020203" pitchFamily="34" charset="0"/>
+                <a:cs typeface="Segoe UI" panose="020B0502040204020203" pitchFamily="34" charset="0"/>
+              </a:rPr>
+              <a:t> Beispiele</a:t>
             </a:r>
             <a:endParaRPr lang="de-DE" sz="2800" dirty="0">
               <a:solidFill>
@@ -6823,13 +6904,13 @@
   <p:clrMapOvr>
     <a:masterClrMapping/>
   </p:clrMapOvr>
-  <mc:AlternateContent xmlns:mc="http://schemas.openxmlformats.org/markup-compatibility/2006">
-    <mc:Choice xmlns:p159="http://schemas.microsoft.com/office/powerpoint/2015/09/main" Requires="p159">
+  <mc:AlternateContent xmlns:mc="http://schemas.openxmlformats.org/markup-compatibility/2006" xmlns:p159="http://schemas.microsoft.com/office/powerpoint/2015/09/main">
+    <mc:Choice Requires="p159">
       <p:transition xmlns:p14="http://schemas.microsoft.com/office/powerpoint/2010/main" spd="slow" p14:dur="2000">
         <p159:morph option="byObject"/>
       </p:transition>
     </mc:Choice>
-    <mc:Fallback>
+    <mc:Fallback xmlns="">
       <p:transition spd="slow">
         <p:fade/>
       </p:transition>
@@ -6876,7 +6957,7 @@
         <p:spPr>
           <a:xfrm>
             <a:off x="987826" y="5495344"/>
-            <a:ext cx="2880360" cy="720000"/>
+            <a:ext cx="4680000" cy="720000"/>
           </a:xfrm>
           <a:prstGeom prst="roundRect">
             <a:avLst/>
@@ -6933,7 +7014,7 @@
           <a:p>
             <a:fld id="{985ED463-2B82-4176-987F-FE0CD52B7183}" type="datetime1">
               <a:rPr lang="de-DE" smtClean="0"/>
-              <a:t>01.05.2026</a:t>
+              <a:t>03.05.2026</a:t>
             </a:fld>
             <a:endParaRPr lang="de-DE"/>
           </a:p>
@@ -7052,8 +7133,8 @@
         </p:nvSpPr>
         <p:spPr>
           <a:xfrm>
-            <a:off x="987826" y="1269507"/>
-            <a:ext cx="2412000" cy="461665"/>
+            <a:off x="987826" y="1269506"/>
+            <a:ext cx="4320000" cy="504000"/>
           </a:xfrm>
           <a:prstGeom prst="rect">
             <a:avLst/>
@@ -7074,7 +7155,7 @@
                 <a:latin typeface="Segoe UI" panose="020B0502040204020203" pitchFamily="34" charset="0"/>
                 <a:cs typeface="Segoe UI" panose="020B0502040204020203" pitchFamily="34" charset="0"/>
               </a:rPr>
-              <a:t>01 Einleitung</a:t>
+              <a:t>01 Einführung</a:t>
             </a:r>
             <a:endParaRPr lang="de-DE" sz="2800" dirty="0">
               <a:solidFill>
@@ -7100,8 +7181,8 @@
         </p:nvSpPr>
         <p:spPr>
           <a:xfrm>
-            <a:off x="987826" y="2001345"/>
-            <a:ext cx="2412000" cy="461665"/>
+            <a:off x="987826" y="2001344"/>
+            <a:ext cx="4320000" cy="461665"/>
           </a:xfrm>
           <a:prstGeom prst="rect">
             <a:avLst/>
@@ -7122,7 +7203,7 @@
                 <a:latin typeface="Segoe UI" panose="020B0502040204020203" pitchFamily="34" charset="0"/>
                 <a:cs typeface="Segoe UI" panose="020B0502040204020203" pitchFamily="34" charset="0"/>
               </a:rPr>
-              <a:t>02 Grundlagen</a:t>
+              <a:t>02 Reguläre Ausdrücke in Java</a:t>
             </a:r>
             <a:endParaRPr lang="de-DE" sz="2800" dirty="0">
               <a:solidFill>
@@ -7148,8 +7229,8 @@
         </p:nvSpPr>
         <p:spPr>
           <a:xfrm>
-            <a:off x="987826" y="2733183"/>
-            <a:ext cx="2412000" cy="461665"/>
+            <a:off x="987826" y="2733182"/>
+            <a:ext cx="4320000" cy="461665"/>
           </a:xfrm>
           <a:prstGeom prst="rect">
             <a:avLst/>
@@ -7170,7 +7251,27 @@
                 <a:latin typeface="Segoe UI" panose="020B0502040204020203" pitchFamily="34" charset="0"/>
                 <a:cs typeface="Segoe UI" panose="020B0502040204020203" pitchFamily="34" charset="0"/>
               </a:rPr>
-              <a:t>03 Technologien</a:t>
+              <a:t>03 Java </a:t>
+            </a:r>
+            <a:r>
+              <a:rPr lang="de-DE" sz="2400" dirty="0" err="1">
+                <a:solidFill>
+                  <a:schemeClr val="bg1"/>
+                </a:solidFill>
+                <a:latin typeface="Segoe UI" panose="020B0502040204020203" pitchFamily="34" charset="0"/>
+                <a:cs typeface="Segoe UI" panose="020B0502040204020203" pitchFamily="34" charset="0"/>
+              </a:rPr>
+              <a:t>Regex</a:t>
+            </a:r>
+            <a:r>
+              <a:rPr lang="de-DE" sz="2400" dirty="0">
+                <a:solidFill>
+                  <a:schemeClr val="bg1"/>
+                </a:solidFill>
+                <a:latin typeface="Segoe UI" panose="020B0502040204020203" pitchFamily="34" charset="0"/>
+                <a:cs typeface="Segoe UI" panose="020B0502040204020203" pitchFamily="34" charset="0"/>
+              </a:rPr>
+              <a:t> API</a:t>
             </a:r>
             <a:endParaRPr lang="de-DE" sz="2800" dirty="0">
               <a:solidFill>
@@ -7196,8 +7297,8 @@
         </p:nvSpPr>
         <p:spPr>
           <a:xfrm>
-            <a:off x="987826" y="3465021"/>
-            <a:ext cx="2412000" cy="461665"/>
+            <a:off x="987826" y="3465020"/>
+            <a:ext cx="4320000" cy="461665"/>
           </a:xfrm>
           <a:prstGeom prst="rect">
             <a:avLst/>
@@ -7218,7 +7319,7 @@
                 <a:latin typeface="Segoe UI" panose="020B0502040204020203" pitchFamily="34" charset="0"/>
                 <a:cs typeface="Segoe UI" panose="020B0502040204020203" pitchFamily="34" charset="0"/>
               </a:rPr>
-              <a:t>04 Programm</a:t>
+              <a:t>04 Barcode Grundlagen</a:t>
             </a:r>
             <a:endParaRPr lang="de-DE" sz="2800" dirty="0">
               <a:solidFill>
@@ -7244,8 +7345,8 @@
         </p:nvSpPr>
         <p:spPr>
           <a:xfrm>
-            <a:off x="987826" y="4196857"/>
-            <a:ext cx="2412000" cy="461665"/>
+            <a:off x="987826" y="4196856"/>
+            <a:ext cx="4320000" cy="461665"/>
           </a:xfrm>
           <a:prstGeom prst="rect">
             <a:avLst/>
@@ -7266,17 +7367,7 @@
                 <a:latin typeface="Segoe UI" panose="020B0502040204020203" pitchFamily="34" charset="0"/>
                 <a:cs typeface="Segoe UI" panose="020B0502040204020203" pitchFamily="34" charset="0"/>
               </a:rPr>
-              <a:t>05 Ipse </a:t>
-            </a:r>
-            <a:r>
-              <a:rPr lang="de-DE" sz="2400" dirty="0" err="1">
-                <a:solidFill>
-                  <a:schemeClr val="bg1"/>
-                </a:solidFill>
-                <a:latin typeface="Segoe UI" panose="020B0502040204020203" pitchFamily="34" charset="0"/>
-                <a:cs typeface="Segoe UI" panose="020B0502040204020203" pitchFamily="34" charset="0"/>
-              </a:rPr>
-              <a:t>Lorum</a:t>
+              <a:t>05 QR-Code Grundlagen</a:t>
             </a:r>
             <a:endParaRPr lang="de-DE" sz="2800" dirty="0">
               <a:solidFill>
@@ -7302,8 +7393,8 @@
         </p:nvSpPr>
         <p:spPr>
           <a:xfrm>
-            <a:off x="987826" y="4892674"/>
-            <a:ext cx="2412000" cy="461665"/>
+            <a:off x="987826" y="4892673"/>
+            <a:ext cx="4320000" cy="461665"/>
           </a:xfrm>
           <a:prstGeom prst="rect">
             <a:avLst/>
@@ -7324,7 +7415,27 @@
                 <a:latin typeface="Segoe UI" panose="020B0502040204020203" pitchFamily="34" charset="0"/>
                 <a:cs typeface="Segoe UI" panose="020B0502040204020203" pitchFamily="34" charset="0"/>
               </a:rPr>
-              <a:t>06 Ergebnisse</a:t>
+              <a:t>06 </a:t>
+            </a:r>
+            <a:r>
+              <a:rPr lang="de-DE" sz="2400" dirty="0" err="1">
+                <a:solidFill>
+                  <a:schemeClr val="bg1"/>
+                </a:solidFill>
+                <a:latin typeface="Segoe UI" panose="020B0502040204020203" pitchFamily="34" charset="0"/>
+                <a:cs typeface="Segoe UI" panose="020B0502040204020203" pitchFamily="34" charset="0"/>
+              </a:rPr>
+              <a:t>Regex</a:t>
+            </a:r>
+            <a:r>
+              <a:rPr lang="de-DE" sz="2400" dirty="0">
+                <a:solidFill>
+                  <a:schemeClr val="bg1"/>
+                </a:solidFill>
+                <a:latin typeface="Segoe UI" panose="020B0502040204020203" pitchFamily="34" charset="0"/>
+                <a:cs typeface="Segoe UI" panose="020B0502040204020203" pitchFamily="34" charset="0"/>
+              </a:rPr>
+              <a:t> Beispiele</a:t>
             </a:r>
             <a:endParaRPr lang="de-DE" sz="2800" dirty="0">
               <a:solidFill>
@@ -7350,8 +7461,8 @@
         </p:nvSpPr>
         <p:spPr>
           <a:xfrm>
-            <a:off x="987827" y="5588491"/>
-            <a:ext cx="2412000" cy="461665"/>
+            <a:off x="987827" y="5588489"/>
+            <a:ext cx="4320000" cy="504000"/>
           </a:xfrm>
           <a:prstGeom prst="rect">
             <a:avLst/>
@@ -7372,7 +7483,7 @@
                 <a:latin typeface="Segoe UI" panose="020B0502040204020203" pitchFamily="34" charset="0"/>
                 <a:cs typeface="Segoe UI" panose="020B0502040204020203" pitchFamily="34" charset="0"/>
               </a:rPr>
-              <a:t>07 Fazit</a:t>
+              <a:t>07 Fazit und Übergang</a:t>
             </a:r>
             <a:endParaRPr lang="de-DE" sz="2800" dirty="0">
               <a:solidFill>
@@ -7394,18 +7505,162 @@
   <p:clrMapOvr>
     <a:masterClrMapping/>
   </p:clrMapOvr>
-  <mc:AlternateContent xmlns:mc="http://schemas.openxmlformats.org/markup-compatibility/2006">
-    <mc:Choice xmlns:p159="http://schemas.microsoft.com/office/powerpoint/2015/09/main" Requires="p159">
+  <mc:AlternateContent xmlns:mc="http://schemas.openxmlformats.org/markup-compatibility/2006" xmlns:p159="http://schemas.microsoft.com/office/powerpoint/2015/09/main">
+    <mc:Choice Requires="p159">
       <p:transition xmlns:p14="http://schemas.microsoft.com/office/powerpoint/2010/main" spd="slow" p14:dur="2000">
         <p159:morph option="byObject"/>
       </p:transition>
     </mc:Choice>
-    <mc:Fallback>
+    <mc:Fallback xmlns="">
       <p:transition spd="slow">
         <p:fade/>
       </p:transition>
     </mc:Fallback>
   </mc:AlternateContent>
+</p:sld>
+</file>
+
+<file path=ppt/slides/slide9.xml><?xml version="1.0" encoding="utf-8"?>
+<p:sld xmlns:a="http://schemas.openxmlformats.org/drawingml/2006/main" xmlns:r="http://schemas.openxmlformats.org/officeDocument/2006/relationships" xmlns:p="http://schemas.openxmlformats.org/presentationml/2006/main">
+  <p:cSld>
+    <p:spTree>
+      <p:nvGrpSpPr>
+        <p:cNvPr id="1" name=""/>
+        <p:cNvGrpSpPr/>
+        <p:nvPr/>
+      </p:nvGrpSpPr>
+      <p:grpSpPr>
+        <a:xfrm>
+          <a:off x="0" y="0"/>
+          <a:ext cx="0" cy="0"/>
+          <a:chOff x="0" y="0"/>
+          <a:chExt cx="0" cy="0"/>
+        </a:xfrm>
+      </p:grpSpPr>
+      <p:sp>
+        <p:nvSpPr>
+          <p:cNvPr id="2" name="Titel 1">
+            <a:extLst>
+              <a:ext uri="{FF2B5EF4-FFF2-40B4-BE49-F238E27FC236}">
+                <a16:creationId xmlns:a16="http://schemas.microsoft.com/office/drawing/2014/main" id="{C6A7562D-2B54-37DE-8578-9B6FF8AB0B7B}"/>
+              </a:ext>
+            </a:extLst>
+          </p:cNvPr>
+          <p:cNvSpPr>
+            <a:spLocks noGrp="1"/>
+          </p:cNvSpPr>
+          <p:nvPr>
+            <p:ph type="title"/>
+          </p:nvPr>
+        </p:nvSpPr>
+        <p:spPr/>
+        <p:txBody>
+          <a:bodyPr/>
+          <a:lstStyle/>
+          <a:p>
+            <a:r>
+              <a:rPr lang="de-DE" dirty="0"/>
+              <a:t>Quellen</a:t>
+            </a:r>
+          </a:p>
+        </p:txBody>
+      </p:sp>
+      <p:sp>
+        <p:nvSpPr>
+          <p:cNvPr id="3" name="Datumsplatzhalter 2">
+            <a:extLst>
+              <a:ext uri="{FF2B5EF4-FFF2-40B4-BE49-F238E27FC236}">
+                <a16:creationId xmlns:a16="http://schemas.microsoft.com/office/drawing/2014/main" id="{F096DF6E-F7FE-1ED9-EAA6-C5E7BB97C15B}"/>
+              </a:ext>
+            </a:extLst>
+          </p:cNvPr>
+          <p:cNvSpPr>
+            <a:spLocks noGrp="1"/>
+          </p:cNvSpPr>
+          <p:nvPr>
+            <p:ph type="dt" sz="half" idx="10"/>
+          </p:nvPr>
+        </p:nvSpPr>
+        <p:spPr/>
+        <p:txBody>
+          <a:bodyPr/>
+          <a:lstStyle/>
+          <a:p>
+            <a:fld id="{3E086AD1-C6AA-4A0B-9285-E76F4B3B589A}" type="datetime1">
+              <a:rPr lang="de-DE" smtClean="0"/>
+              <a:t>03.05.2026</a:t>
+            </a:fld>
+            <a:endParaRPr lang="de-DE"/>
+          </a:p>
+        </p:txBody>
+      </p:sp>
+      <p:sp>
+        <p:nvSpPr>
+          <p:cNvPr id="4" name="Fußzeilenplatzhalter 3">
+            <a:extLst>
+              <a:ext uri="{FF2B5EF4-FFF2-40B4-BE49-F238E27FC236}">
+                <a16:creationId xmlns:a16="http://schemas.microsoft.com/office/drawing/2014/main" id="{C58F932D-4136-BE0C-77BD-4B2F03B31DC1}"/>
+              </a:ext>
+            </a:extLst>
+          </p:cNvPr>
+          <p:cNvSpPr>
+            <a:spLocks noGrp="1"/>
+          </p:cNvSpPr>
+          <p:nvPr>
+            <p:ph type="ftr" sz="quarter" idx="11"/>
+          </p:nvPr>
+        </p:nvSpPr>
+        <p:spPr/>
+        <p:txBody>
+          <a:bodyPr/>
+          <a:lstStyle/>
+          <a:p>
+            <a:r>
+              <a:rPr lang="de-DE"/>
+              <a:t>E. Mörz | T. Schemmel | P. Leo</a:t>
+            </a:r>
+          </a:p>
+        </p:txBody>
+      </p:sp>
+      <p:sp>
+        <p:nvSpPr>
+          <p:cNvPr id="5" name="Foliennummernplatzhalter 4">
+            <a:extLst>
+              <a:ext uri="{FF2B5EF4-FFF2-40B4-BE49-F238E27FC236}">
+                <a16:creationId xmlns:a16="http://schemas.microsoft.com/office/drawing/2014/main" id="{D584ADB3-B279-6C22-7283-33A24EFEAD52}"/>
+              </a:ext>
+            </a:extLst>
+          </p:cNvPr>
+          <p:cNvSpPr>
+            <a:spLocks noGrp="1"/>
+          </p:cNvSpPr>
+          <p:nvPr>
+            <p:ph type="sldNum" sz="quarter" idx="12"/>
+          </p:nvPr>
+        </p:nvSpPr>
+        <p:spPr/>
+        <p:txBody>
+          <a:bodyPr/>
+          <a:lstStyle/>
+          <a:p>
+            <a:fld id="{C5A27200-5F91-40CC-836D-BF641FCA7F20}" type="slidenum">
+              <a:rPr lang="de-DE" smtClean="0"/>
+              <a:t>9</a:t>
+            </a:fld>
+            <a:endParaRPr lang="de-DE"/>
+          </a:p>
+        </p:txBody>
+      </p:sp>
+    </p:spTree>
+    <p:extLst>
+      <p:ext uri="{BB962C8B-B14F-4D97-AF65-F5344CB8AC3E}">
+        <p14:creationId xmlns:p14="http://schemas.microsoft.com/office/powerpoint/2010/main" val="1756029255"/>
+      </p:ext>
+    </p:extLst>
+  </p:cSld>
+  <p:clrMapOvr>
+    <a:masterClrMapping/>
+  </p:clrMapOvr>
 </p:sld>
 </file>
 
